--- a/lecons/LSA/Biogeography/12_LSA_BIO_L11_Classes_of_Soil.pptx
+++ b/lecons/LSA/Biogeography/12_LSA_BIO_L11_Classes_of_Soil.pptx
@@ -3984,7 +3984,7 @@
           <a:p>
             <a:r>
               <a:rPr lang="en-US" dirty="0"/>
-              <a:t>For your homework: Give one zonal, one intrazonal and one azonal soil found in Cameroon. We shall correct it at the beginning of our next lesson.</a:t>
+              <a:t>For your homework: Define natural vegetation. We shall correct it at the beginning of our next lesson.</a:t>
             </a:r>
             <a:endParaRPr lang="en-US" dirty="0"/>
           </a:p>
@@ -4072,7 +4072,7 @@
           <a:p>
             <a:r>
               <a:rPr lang="en-US" dirty="0"/>
-              <a:t>Our next lesson will be on Further Study 1: Soils of Cameroon. Thank you for your attention, and see you next time.</a:t>
+              <a:t>Our next lesson will be on Lesson 12: Meaning of Natural Vegetation. Thank you for your attention, and see you next time.</a:t>
             </a:r>
             <a:endParaRPr lang="en-US" dirty="0"/>
           </a:p>
@@ -16125,7 +16125,7 @@
                 <a:ea typeface="Times New Roman" pitchFamily="34" charset="-122"/>
                 <a:cs typeface="Times New Roman" pitchFamily="34" charset="-120"/>
               </a:rPr>
-              <a:t>Give one zonal, one intrazonal and one azonal soil found in Cameroon.</a:t>
+              <a:t>Define natural vegetation.</a:t>
             </a:r>
             <a:endParaRPr lang="en-US" sz="4000" dirty="0"/>
           </a:p>
@@ -16364,7 +16364,7 @@
                 <a:ea typeface="Times New Roman" pitchFamily="34" charset="-122"/>
                 <a:cs typeface="Times New Roman" pitchFamily="34" charset="-120"/>
               </a:rPr>
-              <a:t>Further Study 1: Soils of Cameroon</a:t>
+              <a:t>Lesson 12: Meaning of Natural Vegetation</a:t>
             </a:r>
             <a:endParaRPr lang="en-US" sz="4000" dirty="0"/>
           </a:p>
@@ -18789,7 +18789,7 @@
                           <a:ea typeface="Calibri" pitchFamily="34" charset="-122"/>
                           <a:cs typeface="Calibri" pitchFamily="34" charset="-120"/>
                         </a:rPr>
-                        <a:t>Give one zonal, one intrazonal and one azonal soil found in Cameroon.</a:t>
+                        <a:t>Define natural vegetation.</a:t>
                       </a:r>
                       <a:endParaRPr lang="en-US" sz="1600" dirty="0">
                         <a:latin typeface="Calibri" charset="0"/>
